--- a/templates/posts/october/10-10-2026-sat-ig-soil-regenerators-lisa-price.pptx
+++ b/templates/posts/october/10-10-2026-sat-ig-soil-regenerators-lisa-price.pptx
@@ -502,7 +502,7 @@
           <a:lstStyle/>
           <a:p>
             <a:r>
-              <a:t>Template 1A. [PHOTO NEEDED: Lisa with her seedlings] Seedling-tray collage not generated (Replicate throttled) [COLLAGE NEEDED: seedling tray].</a:t>
+              <a:t>Template 1A, scrapbook. [PHOTO NEEDED: Lisa with her seedlings] Photo box holds the colour logo until then. Seedling tray (vegetable, herb and flower seedlings in little pots) is a drawn sticker.</a:t>
             </a:r>
           </a:p>
         </p:txBody>
@@ -3504,7 +3504,7 @@
     <p:bg>
       <p:bgPr>
         <a:solidFill>
-          <a:srgbClr val="22371F"/>
+          <a:srgbClr val="F4F1EA"/>
         </a:solidFill>
         <a:effectLst/>
       </p:bgPr>
@@ -3516,16 +3516,90 @@
         <p:nvPr/>
       </p:nvGrpSpPr>
       <p:grpSpPr/>
-      <p:sp>
-        <p:nvSpPr>
-          <p:cNvPr id="2" name="Rectangle 1"/>
-          <p:cNvSpPr/>
+      <p:pic>
+        <p:nvPicPr>
+          <p:cNvPr id="2" name="Picture 1" descr="paper-grain-cream.jpg"/>
+          <p:cNvPicPr>
+            <a:picLocks noChangeAspect="1"/>
+          </p:cNvPicPr>
           <p:nvPr/>
-        </p:nvSpPr>
+        </p:nvPicPr>
+        <p:blipFill>
+          <a:blip r:embed="rId3"/>
+          <a:stretch>
+            <a:fillRect/>
+          </a:stretch>
+        </p:blipFill>
         <p:spPr>
           <a:xfrm>
             <a:off x="0" y="0"/>
             <a:ext cx="10287000" cy="12858750"/>
+          </a:xfrm>
+          <a:prstGeom prst="rect">
+            <a:avLst/>
+          </a:prstGeom>
+        </p:spPr>
+      </p:pic>
+      <p:sp>
+        <p:nvSpPr>
+          <p:cNvPr id="3" name="Rectangle 2"/>
+          <p:cNvSpPr/>
+          <p:nvPr/>
+        </p:nvSpPr>
+        <p:spPr>
+          <a:xfrm rot="120000">
+            <a:off x="857250" y="1428750"/>
+            <a:ext cx="8572500" cy="7810500"/>
+          </a:xfrm>
+          <a:prstGeom prst="rect">
+            <a:avLst/>
+          </a:prstGeom>
+          <a:solidFill>
+            <a:srgbClr val="FFFDF7"/>
+          </a:solidFill>
+          <a:ln>
+            <a:noFill/>
+          </a:ln>
+          <a:effectLst>
+            <a:outerShdw blurRad="228600" dist="76200" dir="5400000" algn="t" rotWithShape="0">
+              <a:srgbClr val="000000">
+                <a:alpha val="30000"/>
+              </a:srgbClr>
+            </a:outerShdw>
+          </a:effectLst>
+        </p:spPr>
+        <p:style>
+          <a:lnRef idx="1">
+            <a:schemeClr val="accent1"/>
+          </a:lnRef>
+          <a:fillRef idx="3">
+            <a:schemeClr val="accent1"/>
+          </a:fillRef>
+          <a:effectRef idx="2">
+            <a:schemeClr val="accent1"/>
+          </a:effectRef>
+          <a:fontRef idx="minor">
+            <a:schemeClr val="lt1"/>
+          </a:fontRef>
+        </p:style>
+        <p:txBody>
+          <a:bodyPr rtlCol="0" anchor="ctr"/>
+          <a:lstStyle/>
+          <a:p>
+            <a:pPr algn="ctr"/>
+          </a:p>
+        </p:txBody>
+      </p:sp>
+      <p:sp>
+        <p:nvSpPr>
+          <p:cNvPr id="4" name="Rectangle 3"/>
+          <p:cNvSpPr/>
+          <p:nvPr/>
+        </p:nvSpPr>
+        <p:spPr>
+          <a:xfrm rot="120000">
+            <a:off x="1107009" y="1667078"/>
+            <a:ext cx="8096250" cy="6667500"/>
           </a:xfrm>
           <a:prstGeom prst="rect">
             <a:avLst/>
@@ -3567,22 +3641,22 @@
       </p:sp>
       <p:pic>
         <p:nvPicPr>
-          <p:cNvPr id="3" name="Picture 2" descr="foundation-logo-color.png"/>
+          <p:cNvPr id="5" name="Picture 4" descr="foundation-logo-color.png"/>
           <p:cNvPicPr>
             <a:picLocks noChangeAspect="1"/>
           </p:cNvPicPr>
           <p:nvPr/>
         </p:nvPicPr>
         <p:blipFill>
-          <a:blip r:embed="rId3"/>
+          <a:blip r:embed="rId4"/>
           <a:stretch>
             <a:fillRect/>
           </a:stretch>
         </p:blipFill>
         <p:spPr>
           <a:xfrm>
-            <a:off x="2314575" y="3886007"/>
-            <a:ext cx="5657850" cy="5086734"/>
+            <a:off x="3238500" y="3286125"/>
+            <a:ext cx="3810000" cy="3425410"/>
           </a:xfrm>
           <a:prstGeom prst="rect">
             <a:avLst/>
@@ -3591,79 +3665,21 @@
       </p:pic>
       <p:sp>
         <p:nvSpPr>
-          <p:cNvPr id="4" name="Rectangle 3"/>
+          <p:cNvPr id="6" name="Rectangle 5"/>
           <p:cNvSpPr/>
           <p:nvPr/>
         </p:nvSpPr>
         <p:spPr>
-          <a:xfrm>
-            <a:off x="0" y="7077075"/>
-            <a:ext cx="10287000" cy="5781675"/>
+          <a:xfrm rot="19800000">
+            <a:off x="571500" y="1276350"/>
+            <a:ext cx="1714500" cy="495300"/>
           </a:xfrm>
           <a:prstGeom prst="rect">
             <a:avLst/>
           </a:prstGeom>
-          <a:gradFill rotWithShape="1">
-            <a:gsLst>
-              <a:gs pos="0">
-                <a:srgbClr val="22371F">
-                  <a:alpha val="0"/>
-                </a:srgbClr>
-              </a:gs>
-              <a:gs pos="100000">
-                <a:srgbClr val="22371F">
-                  <a:alpha val="92000"/>
-                </a:srgbClr>
-              </a:gs>
-            </a:gsLst>
-            <a:lin ang="5400000" scaled="0"/>
-          </a:gradFill>
-          <a:ln>
-            <a:noFill/>
-          </a:ln>
-          <a:effectLst/>
-        </p:spPr>
-        <p:style>
-          <a:lnRef idx="1">
-            <a:schemeClr val="accent1"/>
-          </a:lnRef>
-          <a:fillRef idx="3">
-            <a:schemeClr val="accent1"/>
-          </a:fillRef>
-          <a:effectRef idx="2">
-            <a:schemeClr val="accent1"/>
-          </a:effectRef>
-          <a:fontRef idx="minor">
-            <a:schemeClr val="lt1"/>
-          </a:fontRef>
-        </p:style>
-        <p:txBody>
-          <a:bodyPr rtlCol="0" anchor="ctr"/>
-          <a:lstStyle/>
-          <a:p>
-            <a:pPr algn="ctr"/>
-          </a:p>
-        </p:txBody>
-      </p:sp>
-      <p:sp>
-        <p:nvSpPr>
-          <p:cNvPr id="5" name="Rounded Rectangle 4"/>
-          <p:cNvSpPr/>
-          <p:nvPr/>
-        </p:nvSpPr>
-        <p:spPr>
-          <a:xfrm>
-            <a:off x="762000" y="762000"/>
-            <a:ext cx="5905500" cy="666750"/>
-          </a:xfrm>
-          <a:prstGeom prst="roundRect">
-            <a:avLst>
-              <a:gd name="adj" fmla="val 50000"/>
-            </a:avLst>
-          </a:prstGeom>
           <a:solidFill>
-            <a:srgbClr val="22371F">
-              <a:alpha val="85000"/>
+            <a:srgbClr val="DBE6A7">
+              <a:alpha val="70000"/>
             </a:srgbClr>
           </a:solidFill>
           <a:ln>
@@ -3695,59 +3711,22 @@
       </p:sp>
       <p:sp>
         <p:nvSpPr>
-          <p:cNvPr id="6" name="TextBox 5"/>
-          <p:cNvSpPr txBox="1"/>
-          <p:nvPr/>
-        </p:nvSpPr>
-        <p:spPr>
-          <a:xfrm>
-            <a:off x="762000" y="762000"/>
-            <a:ext cx="5905500" cy="666750"/>
-          </a:xfrm>
-          <a:prstGeom prst="rect">
-            <a:avLst/>
-          </a:prstGeom>
-          <a:noFill/>
-        </p:spPr>
-        <p:txBody>
-          <a:bodyPr wrap="square" lIns="0" rIns="0" tIns="0" bIns="0" anchor="ctr">
-            <a:spAutoFit/>
-          </a:bodyPr>
-          <a:lstStyle/>
-          <a:p>
-            <a:pPr algn="ctr">
-              <a:lnSpc>
-                <a:spcPct val="120000"/>
-              </a:lnSpc>
-            </a:pPr>
-            <a:r>
-              <a:rPr sz="2600" b="1" i="0">
-                <a:solidFill>
-                  <a:srgbClr val="DBE6A7"/>
-                </a:solidFill>
-                <a:latin typeface="Montserrat"/>
-              </a:rPr>
-              <a:t>Soil Regenerators in the wild</a:t>
-            </a:r>
-          </a:p>
-        </p:txBody>
-      </p:sp>
-      <p:sp>
-        <p:nvSpPr>
           <p:cNvPr id="7" name="Rectangle 6"/>
           <p:cNvSpPr/>
           <p:nvPr/>
         </p:nvSpPr>
         <p:spPr>
-          <a:xfrm>
-            <a:off x="762000" y="10058400"/>
-            <a:ext cx="1143000" cy="38100"/>
+          <a:xfrm rot="1800000">
+            <a:off x="8001000" y="1276350"/>
+            <a:ext cx="1714500" cy="495300"/>
           </a:xfrm>
           <a:prstGeom prst="rect">
             <a:avLst/>
           </a:prstGeom>
           <a:solidFill>
-            <a:srgbClr val="59A66C"/>
+            <a:srgbClr val="DBE6A7">
+              <a:alpha val="70000"/>
+            </a:srgbClr>
           </a:solidFill>
           <a:ln>
             <a:noFill/>
@@ -3778,14 +3757,1689 @@
       </p:sp>
       <p:sp>
         <p:nvSpPr>
-          <p:cNvPr id="8" name="TextBox 7"/>
+          <p:cNvPr id="8" name="Rounded Rectangle 7"/>
+          <p:cNvSpPr/>
+          <p:nvPr/>
+        </p:nvSpPr>
+        <p:spPr>
+          <a:xfrm>
+            <a:off x="762000" y="571500"/>
+            <a:ext cx="5905500" cy="666750"/>
+          </a:xfrm>
+          <a:prstGeom prst="roundRect">
+            <a:avLst>
+              <a:gd name="adj" fmla="val 50000"/>
+            </a:avLst>
+          </a:prstGeom>
+          <a:solidFill>
+            <a:srgbClr val="22371F"/>
+          </a:solidFill>
+          <a:ln>
+            <a:noFill/>
+          </a:ln>
+          <a:effectLst/>
+        </p:spPr>
+        <p:style>
+          <a:lnRef idx="1">
+            <a:schemeClr val="accent1"/>
+          </a:lnRef>
+          <a:fillRef idx="3">
+            <a:schemeClr val="accent1"/>
+          </a:fillRef>
+          <a:effectRef idx="2">
+            <a:schemeClr val="accent1"/>
+          </a:effectRef>
+          <a:fontRef idx="minor">
+            <a:schemeClr val="lt1"/>
+          </a:fontRef>
+        </p:style>
+        <p:txBody>
+          <a:bodyPr rtlCol="0" anchor="ctr"/>
+          <a:lstStyle/>
+          <a:p>
+            <a:pPr algn="ctr"/>
+          </a:p>
+        </p:txBody>
+      </p:sp>
+      <p:sp>
+        <p:nvSpPr>
+          <p:cNvPr id="9" name="TextBox 8"/>
           <p:cNvSpPr txBox="1"/>
           <p:nvPr/>
         </p:nvSpPr>
         <p:spPr>
           <a:xfrm>
-            <a:off x="762000" y="10382250"/>
-            <a:ext cx="8572500" cy="952500"/>
+            <a:off x="762000" y="571500"/>
+            <a:ext cx="5905500" cy="666750"/>
+          </a:xfrm>
+          <a:prstGeom prst="rect">
+            <a:avLst/>
+          </a:prstGeom>
+          <a:noFill/>
+        </p:spPr>
+        <p:txBody>
+          <a:bodyPr wrap="square" lIns="0" rIns="0" tIns="0" bIns="0" anchor="ctr">
+            <a:spAutoFit/>
+          </a:bodyPr>
+          <a:lstStyle/>
+          <a:p>
+            <a:pPr algn="ctr">
+              <a:lnSpc>
+                <a:spcPct val="120000"/>
+              </a:lnSpc>
+            </a:pPr>
+            <a:r>
+              <a:rPr sz="2600" b="1" i="0">
+                <a:solidFill>
+                  <a:srgbClr val="DBE6A7"/>
+                </a:solidFill>
+                <a:latin typeface="Montserrat"/>
+              </a:rPr>
+              <a:t>Soil Regenerators in the wild</a:t>
+            </a:r>
+          </a:p>
+        </p:txBody>
+      </p:sp>
+      <p:grpSp>
+        <p:nvGrpSpPr>
+          <p:cNvPr id="10" name="Group 9"/>
+          <p:cNvGrpSpPr/>
+          <p:nvPr/>
+        </p:nvGrpSpPr>
+        <p:grpSpPr>
+          <a:xfrm rot="21360000">
+            <a:off x="0" y="0"/>
+            <a:ext cx="9429750" cy="9909810"/>
+            <a:chOff x="0" y="0"/>
+            <a:chExt cx="9429750" cy="9909810"/>
+          </a:xfrm>
+        </p:grpSpPr>
+        <p:sp>
+          <p:nvSpPr>
+            <p:cNvPr id="11" name="Trapezoid 10"/>
+            <p:cNvSpPr/>
+            <p:nvPr/>
+          </p:nvSpPr>
+          <p:spPr>
+            <a:xfrm rot="10800000">
+              <a:off x="5973127" y="8925306"/>
+              <a:ext cx="687705" cy="550164"/>
+            </a:xfrm>
+            <a:prstGeom prst="trapezoid">
+              <a:avLst/>
+            </a:prstGeom>
+            <a:solidFill>
+              <a:srgbClr val="C06A3E"/>
+            </a:solidFill>
+            <a:ln w="38100">
+              <a:solidFill>
+                <a:srgbClr val="FFFFFF"/>
+              </a:solidFill>
+            </a:ln>
+            <a:effectLst/>
+          </p:spPr>
+          <p:style>
+            <a:lnRef idx="1">
+              <a:schemeClr val="accent1"/>
+            </a:lnRef>
+            <a:fillRef idx="3">
+              <a:schemeClr val="accent1"/>
+            </a:fillRef>
+            <a:effectRef idx="2">
+              <a:schemeClr val="accent1"/>
+            </a:effectRef>
+            <a:fontRef idx="minor">
+              <a:schemeClr val="lt1"/>
+            </a:fontRef>
+          </p:style>
+          <p:txBody>
+            <a:bodyPr rtlCol="0" anchor="ctr"/>
+            <a:lstStyle/>
+            <a:p>
+              <a:pPr algn="ctr"/>
+            </a:p>
+          </p:txBody>
+        </p:sp>
+        <p:sp>
+          <p:nvSpPr>
+            <p:cNvPr id="12" name="Rectangle 11"/>
+            <p:cNvSpPr/>
+            <p:nvPr/>
+          </p:nvSpPr>
+          <p:spPr>
+            <a:xfrm>
+              <a:off x="5918111" y="8848283"/>
+              <a:ext cx="797737" cy="110032"/>
+            </a:xfrm>
+            <a:prstGeom prst="rect">
+              <a:avLst/>
+            </a:prstGeom>
+            <a:solidFill>
+              <a:srgbClr val="A8552F"/>
+            </a:solidFill>
+            <a:ln w="38100">
+              <a:solidFill>
+                <a:srgbClr val="FFFFFF"/>
+              </a:solidFill>
+            </a:ln>
+            <a:effectLst/>
+          </p:spPr>
+          <p:style>
+            <a:lnRef idx="1">
+              <a:schemeClr val="accent1"/>
+            </a:lnRef>
+            <a:fillRef idx="3">
+              <a:schemeClr val="accent1"/>
+            </a:fillRef>
+            <a:effectRef idx="2">
+              <a:schemeClr val="accent1"/>
+            </a:effectRef>
+            <a:fontRef idx="minor">
+              <a:schemeClr val="lt1"/>
+            </a:fontRef>
+          </p:style>
+          <p:txBody>
+            <a:bodyPr rtlCol="0" anchor="ctr"/>
+            <a:lstStyle/>
+            <a:p>
+              <a:pPr algn="ctr"/>
+            </a:p>
+          </p:txBody>
+        </p:sp>
+        <p:sp>
+          <p:nvSpPr>
+            <p:cNvPr id="13" name="Rectangle 12"/>
+            <p:cNvSpPr/>
+            <p:nvPr/>
+          </p:nvSpPr>
+          <p:spPr>
+            <a:xfrm>
+              <a:off x="6288405" y="8547068"/>
+              <a:ext cx="57150" cy="309467"/>
+            </a:xfrm>
+            <a:prstGeom prst="rect">
+              <a:avLst/>
+            </a:prstGeom>
+            <a:solidFill>
+              <a:srgbClr val="7FA05A"/>
+            </a:solidFill>
+            <a:ln>
+              <a:noFill/>
+            </a:ln>
+            <a:effectLst/>
+          </p:spPr>
+          <p:style>
+            <a:lnRef idx="1">
+              <a:schemeClr val="accent1"/>
+            </a:lnRef>
+            <a:fillRef idx="3">
+              <a:schemeClr val="accent1"/>
+            </a:fillRef>
+            <a:effectRef idx="2">
+              <a:schemeClr val="accent1"/>
+            </a:effectRef>
+            <a:fontRef idx="minor">
+              <a:schemeClr val="lt1"/>
+            </a:fontRef>
+          </p:style>
+          <p:txBody>
+            <a:bodyPr rtlCol="0" anchor="ctr"/>
+            <a:lstStyle/>
+            <a:p>
+              <a:pPr algn="ctr"/>
+            </a:p>
+          </p:txBody>
+        </p:sp>
+        <p:sp>
+          <p:nvSpPr>
+            <p:cNvPr id="14" name="Oval 13"/>
+            <p:cNvSpPr/>
+            <p:nvPr/>
+          </p:nvSpPr>
+          <p:spPr>
+            <a:xfrm rot="19800000">
+              <a:off x="6096914" y="8498928"/>
+              <a:ext cx="275082" cy="151295"/>
+            </a:xfrm>
+            <a:prstGeom prst="ellipse">
+              <a:avLst/>
+            </a:prstGeom>
+            <a:solidFill>
+              <a:srgbClr val="59A66C"/>
+            </a:solidFill>
+            <a:ln w="28575">
+              <a:solidFill>
+                <a:srgbClr val="FFFFFF"/>
+              </a:solidFill>
+            </a:ln>
+            <a:effectLst/>
+          </p:spPr>
+          <p:style>
+            <a:lnRef idx="1">
+              <a:schemeClr val="accent1"/>
+            </a:lnRef>
+            <a:fillRef idx="3">
+              <a:schemeClr val="accent1"/>
+            </a:fillRef>
+            <a:effectRef idx="2">
+              <a:schemeClr val="accent1"/>
+            </a:effectRef>
+            <a:fontRef idx="minor">
+              <a:schemeClr val="lt1"/>
+            </a:fontRef>
+          </p:style>
+          <p:txBody>
+            <a:bodyPr rtlCol="0" anchor="ctr"/>
+            <a:lstStyle/>
+            <a:p>
+              <a:pPr algn="ctr"/>
+            </a:p>
+          </p:txBody>
+        </p:sp>
+        <p:sp>
+          <p:nvSpPr>
+            <p:cNvPr id="15" name="Oval 14"/>
+            <p:cNvSpPr/>
+            <p:nvPr/>
+          </p:nvSpPr>
+          <p:spPr>
+            <a:xfrm rot="1800000">
+              <a:off x="6261963" y="8498928"/>
+              <a:ext cx="275082" cy="151295"/>
+            </a:xfrm>
+            <a:prstGeom prst="ellipse">
+              <a:avLst/>
+            </a:prstGeom>
+            <a:solidFill>
+              <a:srgbClr val="59A66C"/>
+            </a:solidFill>
+            <a:ln w="28575">
+              <a:solidFill>
+                <a:srgbClr val="FFFFFF"/>
+              </a:solidFill>
+            </a:ln>
+            <a:effectLst/>
+          </p:spPr>
+          <p:style>
+            <a:lnRef idx="1">
+              <a:schemeClr val="accent1"/>
+            </a:lnRef>
+            <a:fillRef idx="3">
+              <a:schemeClr val="accent1"/>
+            </a:fillRef>
+            <a:effectRef idx="2">
+              <a:schemeClr val="accent1"/>
+            </a:effectRef>
+            <a:fontRef idx="minor">
+              <a:schemeClr val="lt1"/>
+            </a:fontRef>
+          </p:style>
+          <p:txBody>
+            <a:bodyPr rtlCol="0" anchor="ctr"/>
+            <a:lstStyle/>
+            <a:p>
+              <a:pPr algn="ctr"/>
+            </a:p>
+          </p:txBody>
+        </p:sp>
+        <p:sp>
+          <p:nvSpPr>
+            <p:cNvPr id="16" name="Trapezoid 15"/>
+            <p:cNvSpPr/>
+            <p:nvPr/>
+          </p:nvSpPr>
+          <p:spPr>
+            <a:xfrm rot="10800000">
+              <a:off x="6841807" y="8925306"/>
+              <a:ext cx="687705" cy="550164"/>
+            </a:xfrm>
+            <a:prstGeom prst="trapezoid">
+              <a:avLst/>
+            </a:prstGeom>
+            <a:solidFill>
+              <a:srgbClr val="C06A3E"/>
+            </a:solidFill>
+            <a:ln w="38100">
+              <a:solidFill>
+                <a:srgbClr val="FFFFFF"/>
+              </a:solidFill>
+            </a:ln>
+            <a:effectLst/>
+          </p:spPr>
+          <p:style>
+            <a:lnRef idx="1">
+              <a:schemeClr val="accent1"/>
+            </a:lnRef>
+            <a:fillRef idx="3">
+              <a:schemeClr val="accent1"/>
+            </a:fillRef>
+            <a:effectRef idx="2">
+              <a:schemeClr val="accent1"/>
+            </a:effectRef>
+            <a:fontRef idx="minor">
+              <a:schemeClr val="lt1"/>
+            </a:fontRef>
+          </p:style>
+          <p:txBody>
+            <a:bodyPr rtlCol="0" anchor="ctr"/>
+            <a:lstStyle/>
+            <a:p>
+              <a:pPr algn="ctr"/>
+            </a:p>
+          </p:txBody>
+        </p:sp>
+        <p:sp>
+          <p:nvSpPr>
+            <p:cNvPr id="17" name="Rectangle 16"/>
+            <p:cNvSpPr/>
+            <p:nvPr/>
+          </p:nvSpPr>
+          <p:spPr>
+            <a:xfrm>
+              <a:off x="6786791" y="8848283"/>
+              <a:ext cx="797737" cy="110032"/>
+            </a:xfrm>
+            <a:prstGeom prst="rect">
+              <a:avLst/>
+            </a:prstGeom>
+            <a:solidFill>
+              <a:srgbClr val="A8552F"/>
+            </a:solidFill>
+            <a:ln w="38100">
+              <a:solidFill>
+                <a:srgbClr val="FFFFFF"/>
+              </a:solidFill>
+            </a:ln>
+            <a:effectLst/>
+          </p:spPr>
+          <p:style>
+            <a:lnRef idx="1">
+              <a:schemeClr val="accent1"/>
+            </a:lnRef>
+            <a:fillRef idx="3">
+              <a:schemeClr val="accent1"/>
+            </a:fillRef>
+            <a:effectRef idx="2">
+              <a:schemeClr val="accent1"/>
+            </a:effectRef>
+            <a:fontRef idx="minor">
+              <a:schemeClr val="lt1"/>
+            </a:fontRef>
+          </p:style>
+          <p:txBody>
+            <a:bodyPr rtlCol="0" anchor="ctr"/>
+            <a:lstStyle/>
+            <a:p>
+              <a:pPr algn="ctr"/>
+            </a:p>
+          </p:txBody>
+        </p:sp>
+        <p:sp>
+          <p:nvSpPr>
+            <p:cNvPr id="18" name="Rectangle 17"/>
+            <p:cNvSpPr/>
+            <p:nvPr/>
+          </p:nvSpPr>
+          <p:spPr>
+            <a:xfrm>
+              <a:off x="7157085" y="8547068"/>
+              <a:ext cx="57150" cy="309467"/>
+            </a:xfrm>
+            <a:prstGeom prst="rect">
+              <a:avLst/>
+            </a:prstGeom>
+            <a:solidFill>
+              <a:srgbClr val="7FA05A"/>
+            </a:solidFill>
+            <a:ln>
+              <a:noFill/>
+            </a:ln>
+            <a:effectLst/>
+          </p:spPr>
+          <p:style>
+            <a:lnRef idx="1">
+              <a:schemeClr val="accent1"/>
+            </a:lnRef>
+            <a:fillRef idx="3">
+              <a:schemeClr val="accent1"/>
+            </a:fillRef>
+            <a:effectRef idx="2">
+              <a:schemeClr val="accent1"/>
+            </a:effectRef>
+            <a:fontRef idx="minor">
+              <a:schemeClr val="lt1"/>
+            </a:fontRef>
+          </p:style>
+          <p:txBody>
+            <a:bodyPr rtlCol="0" anchor="ctr"/>
+            <a:lstStyle/>
+            <a:p>
+              <a:pPr algn="ctr"/>
+            </a:p>
+          </p:txBody>
+        </p:sp>
+        <p:sp>
+          <p:nvSpPr>
+            <p:cNvPr id="19" name="Oval 18"/>
+            <p:cNvSpPr/>
+            <p:nvPr/>
+          </p:nvSpPr>
+          <p:spPr>
+            <a:xfrm rot="19800000">
+              <a:off x="6965594" y="8498928"/>
+              <a:ext cx="275082" cy="151295"/>
+            </a:xfrm>
+            <a:prstGeom prst="ellipse">
+              <a:avLst/>
+            </a:prstGeom>
+            <a:solidFill>
+              <a:srgbClr val="4E8F4F"/>
+            </a:solidFill>
+            <a:ln w="28575">
+              <a:solidFill>
+                <a:srgbClr val="FFFFFF"/>
+              </a:solidFill>
+            </a:ln>
+            <a:effectLst/>
+          </p:spPr>
+          <p:style>
+            <a:lnRef idx="1">
+              <a:schemeClr val="accent1"/>
+            </a:lnRef>
+            <a:fillRef idx="3">
+              <a:schemeClr val="accent1"/>
+            </a:fillRef>
+            <a:effectRef idx="2">
+              <a:schemeClr val="accent1"/>
+            </a:effectRef>
+            <a:fontRef idx="minor">
+              <a:schemeClr val="lt1"/>
+            </a:fontRef>
+          </p:style>
+          <p:txBody>
+            <a:bodyPr rtlCol="0" anchor="ctr"/>
+            <a:lstStyle/>
+            <a:p>
+              <a:pPr algn="ctr"/>
+            </a:p>
+          </p:txBody>
+        </p:sp>
+        <p:sp>
+          <p:nvSpPr>
+            <p:cNvPr id="20" name="Oval 19"/>
+            <p:cNvSpPr/>
+            <p:nvPr/>
+          </p:nvSpPr>
+          <p:spPr>
+            <a:xfrm rot="1800000">
+              <a:off x="7130643" y="8498928"/>
+              <a:ext cx="275082" cy="151295"/>
+            </a:xfrm>
+            <a:prstGeom prst="ellipse">
+              <a:avLst/>
+            </a:prstGeom>
+            <a:solidFill>
+              <a:srgbClr val="4E8F4F"/>
+            </a:solidFill>
+            <a:ln w="28575">
+              <a:solidFill>
+                <a:srgbClr val="FFFFFF"/>
+              </a:solidFill>
+            </a:ln>
+            <a:effectLst/>
+          </p:spPr>
+          <p:style>
+            <a:lnRef idx="1">
+              <a:schemeClr val="accent1"/>
+            </a:lnRef>
+            <a:fillRef idx="3">
+              <a:schemeClr val="accent1"/>
+            </a:fillRef>
+            <a:effectRef idx="2">
+              <a:schemeClr val="accent1"/>
+            </a:effectRef>
+            <a:fontRef idx="minor">
+              <a:schemeClr val="lt1"/>
+            </a:fontRef>
+          </p:style>
+          <p:txBody>
+            <a:bodyPr rtlCol="0" anchor="ctr"/>
+            <a:lstStyle/>
+            <a:p>
+              <a:pPr algn="ctr"/>
+            </a:p>
+          </p:txBody>
+        </p:sp>
+        <p:sp>
+          <p:nvSpPr>
+            <p:cNvPr id="21" name="Trapezoid 20"/>
+            <p:cNvSpPr/>
+            <p:nvPr/>
+          </p:nvSpPr>
+          <p:spPr>
+            <a:xfrm rot="10800000">
+              <a:off x="7710487" y="8925306"/>
+              <a:ext cx="687705" cy="550164"/>
+            </a:xfrm>
+            <a:prstGeom prst="trapezoid">
+              <a:avLst/>
+            </a:prstGeom>
+            <a:solidFill>
+              <a:srgbClr val="C06A3E"/>
+            </a:solidFill>
+            <a:ln w="38100">
+              <a:solidFill>
+                <a:srgbClr val="FFFFFF"/>
+              </a:solidFill>
+            </a:ln>
+            <a:effectLst/>
+          </p:spPr>
+          <p:style>
+            <a:lnRef idx="1">
+              <a:schemeClr val="accent1"/>
+            </a:lnRef>
+            <a:fillRef idx="3">
+              <a:schemeClr val="accent1"/>
+            </a:fillRef>
+            <a:effectRef idx="2">
+              <a:schemeClr val="accent1"/>
+            </a:effectRef>
+            <a:fontRef idx="minor">
+              <a:schemeClr val="lt1"/>
+            </a:fontRef>
+          </p:style>
+          <p:txBody>
+            <a:bodyPr rtlCol="0" anchor="ctr"/>
+            <a:lstStyle/>
+            <a:p>
+              <a:pPr algn="ctr"/>
+            </a:p>
+          </p:txBody>
+        </p:sp>
+        <p:sp>
+          <p:nvSpPr>
+            <p:cNvPr id="22" name="Rectangle 21"/>
+            <p:cNvSpPr/>
+            <p:nvPr/>
+          </p:nvSpPr>
+          <p:spPr>
+            <a:xfrm>
+              <a:off x="7655471" y="8848283"/>
+              <a:ext cx="797737" cy="110032"/>
+            </a:xfrm>
+            <a:prstGeom prst="rect">
+              <a:avLst/>
+            </a:prstGeom>
+            <a:solidFill>
+              <a:srgbClr val="A8552F"/>
+            </a:solidFill>
+            <a:ln w="38100">
+              <a:solidFill>
+                <a:srgbClr val="FFFFFF"/>
+              </a:solidFill>
+            </a:ln>
+            <a:effectLst/>
+          </p:spPr>
+          <p:style>
+            <a:lnRef idx="1">
+              <a:schemeClr val="accent1"/>
+            </a:lnRef>
+            <a:fillRef idx="3">
+              <a:schemeClr val="accent1"/>
+            </a:fillRef>
+            <a:effectRef idx="2">
+              <a:schemeClr val="accent1"/>
+            </a:effectRef>
+            <a:fontRef idx="minor">
+              <a:schemeClr val="lt1"/>
+            </a:fontRef>
+          </p:style>
+          <p:txBody>
+            <a:bodyPr rtlCol="0" anchor="ctr"/>
+            <a:lstStyle/>
+            <a:p>
+              <a:pPr algn="ctr"/>
+            </a:p>
+          </p:txBody>
+        </p:sp>
+        <p:sp>
+          <p:nvSpPr>
+            <p:cNvPr id="23" name="Rectangle 22"/>
+            <p:cNvSpPr/>
+            <p:nvPr/>
+          </p:nvSpPr>
+          <p:spPr>
+            <a:xfrm>
+              <a:off x="8025765" y="8547068"/>
+              <a:ext cx="57150" cy="309467"/>
+            </a:xfrm>
+            <a:prstGeom prst="rect">
+              <a:avLst/>
+            </a:prstGeom>
+            <a:solidFill>
+              <a:srgbClr val="7FA05A"/>
+            </a:solidFill>
+            <a:ln>
+              <a:noFill/>
+            </a:ln>
+            <a:effectLst/>
+          </p:spPr>
+          <p:style>
+            <a:lnRef idx="1">
+              <a:schemeClr val="accent1"/>
+            </a:lnRef>
+            <a:fillRef idx="3">
+              <a:schemeClr val="accent1"/>
+            </a:fillRef>
+            <a:effectRef idx="2">
+              <a:schemeClr val="accent1"/>
+            </a:effectRef>
+            <a:fontRef idx="minor">
+              <a:schemeClr val="lt1"/>
+            </a:fontRef>
+          </p:style>
+          <p:txBody>
+            <a:bodyPr rtlCol="0" anchor="ctr"/>
+            <a:lstStyle/>
+            <a:p>
+              <a:pPr algn="ctr"/>
+            </a:p>
+          </p:txBody>
+        </p:sp>
+        <p:sp>
+          <p:nvSpPr>
+            <p:cNvPr id="24" name="Oval 23"/>
+            <p:cNvSpPr/>
+            <p:nvPr/>
+          </p:nvSpPr>
+          <p:spPr>
+            <a:xfrm rot="19800000">
+              <a:off x="7834274" y="8498928"/>
+              <a:ext cx="275082" cy="151295"/>
+            </a:xfrm>
+            <a:prstGeom prst="ellipse">
+              <a:avLst/>
+            </a:prstGeom>
+            <a:solidFill>
+              <a:srgbClr val="7FA05A"/>
+            </a:solidFill>
+            <a:ln w="28575">
+              <a:solidFill>
+                <a:srgbClr val="FFFFFF"/>
+              </a:solidFill>
+            </a:ln>
+            <a:effectLst/>
+          </p:spPr>
+          <p:style>
+            <a:lnRef idx="1">
+              <a:schemeClr val="accent1"/>
+            </a:lnRef>
+            <a:fillRef idx="3">
+              <a:schemeClr val="accent1"/>
+            </a:fillRef>
+            <a:effectRef idx="2">
+              <a:schemeClr val="accent1"/>
+            </a:effectRef>
+            <a:fontRef idx="minor">
+              <a:schemeClr val="lt1"/>
+            </a:fontRef>
+          </p:style>
+          <p:txBody>
+            <a:bodyPr rtlCol="0" anchor="ctr"/>
+            <a:lstStyle/>
+            <a:p>
+              <a:pPr algn="ctr"/>
+            </a:p>
+          </p:txBody>
+        </p:sp>
+        <p:sp>
+          <p:nvSpPr>
+            <p:cNvPr id="25" name="Oval 24"/>
+            <p:cNvSpPr/>
+            <p:nvPr/>
+          </p:nvSpPr>
+          <p:spPr>
+            <a:xfrm rot="1800000">
+              <a:off x="7999323" y="8498928"/>
+              <a:ext cx="275082" cy="151295"/>
+            </a:xfrm>
+            <a:prstGeom prst="ellipse">
+              <a:avLst/>
+            </a:prstGeom>
+            <a:solidFill>
+              <a:srgbClr val="7FA05A"/>
+            </a:solidFill>
+            <a:ln w="28575">
+              <a:solidFill>
+                <a:srgbClr val="FFFFFF"/>
+              </a:solidFill>
+            </a:ln>
+            <a:effectLst/>
+          </p:spPr>
+          <p:style>
+            <a:lnRef idx="1">
+              <a:schemeClr val="accent1"/>
+            </a:lnRef>
+            <a:fillRef idx="3">
+              <a:schemeClr val="accent1"/>
+            </a:fillRef>
+            <a:effectRef idx="2">
+              <a:schemeClr val="accent1"/>
+            </a:effectRef>
+            <a:fontRef idx="minor">
+              <a:schemeClr val="lt1"/>
+            </a:fontRef>
+          </p:style>
+          <p:txBody>
+            <a:bodyPr rtlCol="0" anchor="ctr"/>
+            <a:lstStyle/>
+            <a:p>
+              <a:pPr algn="ctr"/>
+            </a:p>
+          </p:txBody>
+        </p:sp>
+        <p:grpSp>
+          <p:nvGrpSpPr>
+            <p:cNvPr id="26" name="Group 25"/>
+            <p:cNvGrpSpPr/>
+            <p:nvPr/>
+          </p:nvGrpSpPr>
+          <p:grpSpPr>
+            <a:xfrm>
+              <a:off x="0" y="0"/>
+              <a:ext cx="8154469" cy="8577582"/>
+              <a:chOff x="0" y="0"/>
+              <a:chExt cx="8154469" cy="8577582"/>
+            </a:xfrm>
+          </p:grpSpPr>
+          <p:sp>
+            <p:nvSpPr>
+              <p:cNvPr id="27" name="Oval 26"/>
+              <p:cNvSpPr/>
+              <p:nvPr/>
+            </p:nvSpPr>
+            <p:spPr>
+              <a:xfrm>
+                <a:off x="8073595" y="8471970"/>
+                <a:ext cx="80874" cy="53916"/>
+              </a:xfrm>
+              <a:prstGeom prst="ellipse">
+                <a:avLst/>
+              </a:prstGeom>
+              <a:solidFill>
+                <a:srgbClr val="F2CF5B"/>
+              </a:solidFill>
+              <a:ln w="38100">
+                <a:solidFill>
+                  <a:srgbClr val="FFFFFF"/>
+                </a:solidFill>
+              </a:ln>
+              <a:effectLst/>
+            </p:spPr>
+            <p:style>
+              <a:lnRef idx="1">
+                <a:schemeClr val="accent1"/>
+              </a:lnRef>
+              <a:fillRef idx="3">
+                <a:schemeClr val="accent1"/>
+              </a:fillRef>
+              <a:effectRef idx="2">
+                <a:schemeClr val="accent1"/>
+              </a:effectRef>
+              <a:fontRef idx="minor">
+                <a:schemeClr val="lt1"/>
+              </a:fontRef>
+            </p:style>
+            <p:txBody>
+              <a:bodyPr rtlCol="0" anchor="ctr"/>
+              <a:lstStyle/>
+              <a:p>
+                <a:pPr algn="ctr"/>
+              </a:p>
+            </p:txBody>
+          </p:sp>
+          <p:sp>
+            <p:nvSpPr>
+              <p:cNvPr id="28" name="Oval 27"/>
+              <p:cNvSpPr/>
+              <p:nvPr/>
+            </p:nvSpPr>
+            <p:spPr>
+              <a:xfrm rot="3600000">
+                <a:off x="8043749" y="8523666"/>
+                <a:ext cx="80874" cy="53916"/>
+              </a:xfrm>
+              <a:prstGeom prst="ellipse">
+                <a:avLst/>
+              </a:prstGeom>
+              <a:solidFill>
+                <a:srgbClr val="F2CF5B"/>
+              </a:solidFill>
+              <a:ln w="38100">
+                <a:solidFill>
+                  <a:srgbClr val="FFFFFF"/>
+                </a:solidFill>
+              </a:ln>
+              <a:effectLst/>
+            </p:spPr>
+            <p:style>
+              <a:lnRef idx="1">
+                <a:schemeClr val="accent1"/>
+              </a:lnRef>
+              <a:fillRef idx="3">
+                <a:schemeClr val="accent1"/>
+              </a:fillRef>
+              <a:effectRef idx="2">
+                <a:schemeClr val="accent1"/>
+              </a:effectRef>
+              <a:fontRef idx="minor">
+                <a:schemeClr val="lt1"/>
+              </a:fontRef>
+            </p:style>
+            <p:txBody>
+              <a:bodyPr rtlCol="0" anchor="ctr"/>
+              <a:lstStyle/>
+              <a:p>
+                <a:pPr algn="ctr"/>
+              </a:p>
+            </p:txBody>
+          </p:sp>
+          <p:sp>
+            <p:nvSpPr>
+              <p:cNvPr id="29" name="Oval 28"/>
+              <p:cNvSpPr/>
+              <p:nvPr/>
+            </p:nvSpPr>
+            <p:spPr>
+              <a:xfrm rot="7200000">
+                <a:off x="7984056" y="8523666"/>
+                <a:ext cx="80874" cy="53916"/>
+              </a:xfrm>
+              <a:prstGeom prst="ellipse">
+                <a:avLst/>
+              </a:prstGeom>
+              <a:solidFill>
+                <a:srgbClr val="F2CF5B"/>
+              </a:solidFill>
+              <a:ln w="38100">
+                <a:solidFill>
+                  <a:srgbClr val="FFFFFF"/>
+                </a:solidFill>
+              </a:ln>
+              <a:effectLst/>
+            </p:spPr>
+            <p:style>
+              <a:lnRef idx="1">
+                <a:schemeClr val="accent1"/>
+              </a:lnRef>
+              <a:fillRef idx="3">
+                <a:schemeClr val="accent1"/>
+              </a:fillRef>
+              <a:effectRef idx="2">
+                <a:schemeClr val="accent1"/>
+              </a:effectRef>
+              <a:fontRef idx="minor">
+                <a:schemeClr val="lt1"/>
+              </a:fontRef>
+            </p:style>
+            <p:txBody>
+              <a:bodyPr rtlCol="0" anchor="ctr"/>
+              <a:lstStyle/>
+              <a:p>
+                <a:pPr algn="ctr"/>
+              </a:p>
+            </p:txBody>
+          </p:sp>
+          <p:sp>
+            <p:nvSpPr>
+              <p:cNvPr id="30" name="Oval 29"/>
+              <p:cNvSpPr/>
+              <p:nvPr/>
+            </p:nvSpPr>
+            <p:spPr>
+              <a:xfrm rot="10800000">
+                <a:off x="7954210" y="8471970"/>
+                <a:ext cx="80874" cy="53916"/>
+              </a:xfrm>
+              <a:prstGeom prst="ellipse">
+                <a:avLst/>
+              </a:prstGeom>
+              <a:solidFill>
+                <a:srgbClr val="F2CF5B"/>
+              </a:solidFill>
+              <a:ln w="38100">
+                <a:solidFill>
+                  <a:srgbClr val="FFFFFF"/>
+                </a:solidFill>
+              </a:ln>
+              <a:effectLst/>
+            </p:spPr>
+            <p:style>
+              <a:lnRef idx="1">
+                <a:schemeClr val="accent1"/>
+              </a:lnRef>
+              <a:fillRef idx="3">
+                <a:schemeClr val="accent1"/>
+              </a:fillRef>
+              <a:effectRef idx="2">
+                <a:schemeClr val="accent1"/>
+              </a:effectRef>
+              <a:fontRef idx="minor">
+                <a:schemeClr val="lt1"/>
+              </a:fontRef>
+            </p:style>
+            <p:txBody>
+              <a:bodyPr rtlCol="0" anchor="ctr"/>
+              <a:lstStyle/>
+              <a:p>
+                <a:pPr algn="ctr"/>
+              </a:p>
+            </p:txBody>
+          </p:sp>
+          <p:sp>
+            <p:nvSpPr>
+              <p:cNvPr id="31" name="Oval 30"/>
+              <p:cNvSpPr/>
+              <p:nvPr/>
+            </p:nvSpPr>
+            <p:spPr>
+              <a:xfrm rot="14400000">
+                <a:off x="7984056" y="8420275"/>
+                <a:ext cx="80874" cy="53916"/>
+              </a:xfrm>
+              <a:prstGeom prst="ellipse">
+                <a:avLst/>
+              </a:prstGeom>
+              <a:solidFill>
+                <a:srgbClr val="F2CF5B"/>
+              </a:solidFill>
+              <a:ln w="38100">
+                <a:solidFill>
+                  <a:srgbClr val="FFFFFF"/>
+                </a:solidFill>
+              </a:ln>
+              <a:effectLst/>
+            </p:spPr>
+            <p:style>
+              <a:lnRef idx="1">
+                <a:schemeClr val="accent1"/>
+              </a:lnRef>
+              <a:fillRef idx="3">
+                <a:schemeClr val="accent1"/>
+              </a:fillRef>
+              <a:effectRef idx="2">
+                <a:schemeClr val="accent1"/>
+              </a:effectRef>
+              <a:fontRef idx="minor">
+                <a:schemeClr val="lt1"/>
+              </a:fontRef>
+            </p:style>
+            <p:txBody>
+              <a:bodyPr rtlCol="0" anchor="ctr"/>
+              <a:lstStyle/>
+              <a:p>
+                <a:pPr algn="ctr"/>
+              </a:p>
+            </p:txBody>
+          </p:sp>
+          <p:sp>
+            <p:nvSpPr>
+              <p:cNvPr id="32" name="Oval 31"/>
+              <p:cNvSpPr/>
+              <p:nvPr/>
+            </p:nvSpPr>
+            <p:spPr>
+              <a:xfrm rot="18000000">
+                <a:off x="8043749" y="8420275"/>
+                <a:ext cx="80874" cy="53916"/>
+              </a:xfrm>
+              <a:prstGeom prst="ellipse">
+                <a:avLst/>
+              </a:prstGeom>
+              <a:solidFill>
+                <a:srgbClr val="F2CF5B"/>
+              </a:solidFill>
+              <a:ln w="38100">
+                <a:solidFill>
+                  <a:srgbClr val="FFFFFF"/>
+                </a:solidFill>
+              </a:ln>
+              <a:effectLst/>
+            </p:spPr>
+            <p:style>
+              <a:lnRef idx="1">
+                <a:schemeClr val="accent1"/>
+              </a:lnRef>
+              <a:fillRef idx="3">
+                <a:schemeClr val="accent1"/>
+              </a:fillRef>
+              <a:effectRef idx="2">
+                <a:schemeClr val="accent1"/>
+              </a:effectRef>
+              <a:fontRef idx="minor">
+                <a:schemeClr val="lt1"/>
+              </a:fontRef>
+            </p:style>
+            <p:txBody>
+              <a:bodyPr rtlCol="0" anchor="ctr"/>
+              <a:lstStyle/>
+              <a:p>
+                <a:pPr algn="ctr"/>
+              </a:p>
+            </p:txBody>
+          </p:sp>
+          <p:sp>
+            <p:nvSpPr>
+              <p:cNvPr id="33" name="Oval 32"/>
+              <p:cNvSpPr/>
+              <p:nvPr/>
+            </p:nvSpPr>
+            <p:spPr>
+              <a:xfrm>
+                <a:off x="8017754" y="8462342"/>
+                <a:ext cx="73171" cy="73171"/>
+              </a:xfrm>
+              <a:prstGeom prst="ellipse">
+                <a:avLst/>
+              </a:prstGeom>
+              <a:solidFill>
+                <a:srgbClr val="8C6A4E"/>
+              </a:solidFill>
+              <a:ln w="38100">
+                <a:solidFill>
+                  <a:srgbClr val="FFFFFF"/>
+                </a:solidFill>
+              </a:ln>
+              <a:effectLst/>
+            </p:spPr>
+            <p:style>
+              <a:lnRef idx="1">
+                <a:schemeClr val="accent1"/>
+              </a:lnRef>
+              <a:fillRef idx="3">
+                <a:schemeClr val="accent1"/>
+              </a:fillRef>
+              <a:effectRef idx="2">
+                <a:schemeClr val="accent1"/>
+              </a:effectRef>
+              <a:fontRef idx="minor">
+                <a:schemeClr val="lt1"/>
+              </a:fontRef>
+            </p:style>
+            <p:txBody>
+              <a:bodyPr rtlCol="0" anchor="ctr"/>
+              <a:lstStyle/>
+              <a:p>
+                <a:pPr algn="ctr"/>
+              </a:p>
+            </p:txBody>
+          </p:sp>
+        </p:grpSp>
+        <p:sp>
+          <p:nvSpPr>
+            <p:cNvPr id="34" name="Trapezoid 33"/>
+            <p:cNvSpPr/>
+            <p:nvPr/>
+          </p:nvSpPr>
+          <p:spPr>
+            <a:xfrm rot="10800000">
+              <a:off x="8579167" y="8925306"/>
+              <a:ext cx="687705" cy="550164"/>
+            </a:xfrm>
+            <a:prstGeom prst="trapezoid">
+              <a:avLst/>
+            </a:prstGeom>
+            <a:solidFill>
+              <a:srgbClr val="C06A3E"/>
+            </a:solidFill>
+            <a:ln w="38100">
+              <a:solidFill>
+                <a:srgbClr val="FFFFFF"/>
+              </a:solidFill>
+            </a:ln>
+            <a:effectLst/>
+          </p:spPr>
+          <p:style>
+            <a:lnRef idx="1">
+              <a:schemeClr val="accent1"/>
+            </a:lnRef>
+            <a:fillRef idx="3">
+              <a:schemeClr val="accent1"/>
+            </a:fillRef>
+            <a:effectRef idx="2">
+              <a:schemeClr val="accent1"/>
+            </a:effectRef>
+            <a:fontRef idx="minor">
+              <a:schemeClr val="lt1"/>
+            </a:fontRef>
+          </p:style>
+          <p:txBody>
+            <a:bodyPr rtlCol="0" anchor="ctr"/>
+            <a:lstStyle/>
+            <a:p>
+              <a:pPr algn="ctr"/>
+            </a:p>
+          </p:txBody>
+        </p:sp>
+        <p:sp>
+          <p:nvSpPr>
+            <p:cNvPr id="35" name="Rectangle 34"/>
+            <p:cNvSpPr/>
+            <p:nvPr/>
+          </p:nvSpPr>
+          <p:spPr>
+            <a:xfrm>
+              <a:off x="8524151" y="8848283"/>
+              <a:ext cx="797737" cy="110032"/>
+            </a:xfrm>
+            <a:prstGeom prst="rect">
+              <a:avLst/>
+            </a:prstGeom>
+            <a:solidFill>
+              <a:srgbClr val="A8552F"/>
+            </a:solidFill>
+            <a:ln w="38100">
+              <a:solidFill>
+                <a:srgbClr val="FFFFFF"/>
+              </a:solidFill>
+            </a:ln>
+            <a:effectLst/>
+          </p:spPr>
+          <p:style>
+            <a:lnRef idx="1">
+              <a:schemeClr val="accent1"/>
+            </a:lnRef>
+            <a:fillRef idx="3">
+              <a:schemeClr val="accent1"/>
+            </a:fillRef>
+            <a:effectRef idx="2">
+              <a:schemeClr val="accent1"/>
+            </a:effectRef>
+            <a:fontRef idx="minor">
+              <a:schemeClr val="lt1"/>
+            </a:fontRef>
+          </p:style>
+          <p:txBody>
+            <a:bodyPr rtlCol="0" anchor="ctr"/>
+            <a:lstStyle/>
+            <a:p>
+              <a:pPr algn="ctr"/>
+            </a:p>
+          </p:txBody>
+        </p:sp>
+        <p:sp>
+          <p:nvSpPr>
+            <p:cNvPr id="36" name="Rectangle 35"/>
+            <p:cNvSpPr/>
+            <p:nvPr/>
+          </p:nvSpPr>
+          <p:spPr>
+            <a:xfrm>
+              <a:off x="8894445" y="8547068"/>
+              <a:ext cx="57150" cy="309467"/>
+            </a:xfrm>
+            <a:prstGeom prst="rect">
+              <a:avLst/>
+            </a:prstGeom>
+            <a:solidFill>
+              <a:srgbClr val="7FA05A"/>
+            </a:solidFill>
+            <a:ln>
+              <a:noFill/>
+            </a:ln>
+            <a:effectLst/>
+          </p:spPr>
+          <p:style>
+            <a:lnRef idx="1">
+              <a:schemeClr val="accent1"/>
+            </a:lnRef>
+            <a:fillRef idx="3">
+              <a:schemeClr val="accent1"/>
+            </a:fillRef>
+            <a:effectRef idx="2">
+              <a:schemeClr val="accent1"/>
+            </a:effectRef>
+            <a:fontRef idx="minor">
+              <a:schemeClr val="lt1"/>
+            </a:fontRef>
+          </p:style>
+          <p:txBody>
+            <a:bodyPr rtlCol="0" anchor="ctr"/>
+            <a:lstStyle/>
+            <a:p>
+              <a:pPr algn="ctr"/>
+            </a:p>
+          </p:txBody>
+        </p:sp>
+        <p:sp>
+          <p:nvSpPr>
+            <p:cNvPr id="37" name="Oval 36"/>
+            <p:cNvSpPr/>
+            <p:nvPr/>
+          </p:nvSpPr>
+          <p:spPr>
+            <a:xfrm rot="19800000">
+              <a:off x="8702954" y="8498928"/>
+              <a:ext cx="275082" cy="151295"/>
+            </a:xfrm>
+            <a:prstGeom prst="ellipse">
+              <a:avLst/>
+            </a:prstGeom>
+            <a:solidFill>
+              <a:srgbClr val="59A66C"/>
+            </a:solidFill>
+            <a:ln w="28575">
+              <a:solidFill>
+                <a:srgbClr val="FFFFFF"/>
+              </a:solidFill>
+            </a:ln>
+            <a:effectLst/>
+          </p:spPr>
+          <p:style>
+            <a:lnRef idx="1">
+              <a:schemeClr val="accent1"/>
+            </a:lnRef>
+            <a:fillRef idx="3">
+              <a:schemeClr val="accent1"/>
+            </a:fillRef>
+            <a:effectRef idx="2">
+              <a:schemeClr val="accent1"/>
+            </a:effectRef>
+            <a:fontRef idx="minor">
+              <a:schemeClr val="lt1"/>
+            </a:fontRef>
+          </p:style>
+          <p:txBody>
+            <a:bodyPr rtlCol="0" anchor="ctr"/>
+            <a:lstStyle/>
+            <a:p>
+              <a:pPr algn="ctr"/>
+            </a:p>
+          </p:txBody>
+        </p:sp>
+        <p:sp>
+          <p:nvSpPr>
+            <p:cNvPr id="38" name="Oval 37"/>
+            <p:cNvSpPr/>
+            <p:nvPr/>
+          </p:nvSpPr>
+          <p:spPr>
+            <a:xfrm rot="1800000">
+              <a:off x="8868003" y="8498928"/>
+              <a:ext cx="275082" cy="151295"/>
+            </a:xfrm>
+            <a:prstGeom prst="ellipse">
+              <a:avLst/>
+            </a:prstGeom>
+            <a:solidFill>
+              <a:srgbClr val="59A66C"/>
+            </a:solidFill>
+            <a:ln w="28575">
+              <a:solidFill>
+                <a:srgbClr val="FFFFFF"/>
+              </a:solidFill>
+            </a:ln>
+            <a:effectLst/>
+          </p:spPr>
+          <p:style>
+            <a:lnRef idx="1">
+              <a:schemeClr val="accent1"/>
+            </a:lnRef>
+            <a:fillRef idx="3">
+              <a:schemeClr val="accent1"/>
+            </a:fillRef>
+            <a:effectRef idx="2">
+              <a:schemeClr val="accent1"/>
+            </a:effectRef>
+            <a:fontRef idx="minor">
+              <a:schemeClr val="lt1"/>
+            </a:fontRef>
+          </p:style>
+          <p:txBody>
+            <a:bodyPr rtlCol="0" anchor="ctr"/>
+            <a:lstStyle/>
+            <a:p>
+              <a:pPr algn="ctr"/>
+            </a:p>
+          </p:txBody>
+        </p:sp>
+        <p:sp>
+          <p:nvSpPr>
+            <p:cNvPr id="39" name="Rectangle 38"/>
+            <p:cNvSpPr/>
+            <p:nvPr/>
+          </p:nvSpPr>
+          <p:spPr>
+            <a:xfrm>
+              <a:off x="5810250" y="9330690"/>
+              <a:ext cx="3619500" cy="579120"/>
+            </a:xfrm>
+            <a:prstGeom prst="rect">
+              <a:avLst/>
+            </a:prstGeom>
+            <a:solidFill>
+              <a:srgbClr val="B98A5E"/>
+            </a:solidFill>
+            <a:ln w="57150">
+              <a:solidFill>
+                <a:srgbClr val="FFFFFF"/>
+              </a:solidFill>
+            </a:ln>
+            <a:effectLst>
+              <a:outerShdw blurRad="228600" dist="76200" dir="5400000" algn="t" rotWithShape="0">
+                <a:srgbClr val="000000">
+                  <a:alpha val="30000"/>
+                </a:srgbClr>
+              </a:outerShdw>
+            </a:effectLst>
+          </p:spPr>
+          <p:style>
+            <a:lnRef idx="1">
+              <a:schemeClr val="accent1"/>
+            </a:lnRef>
+            <a:fillRef idx="3">
+              <a:schemeClr val="accent1"/>
+            </a:fillRef>
+            <a:effectRef idx="2">
+              <a:schemeClr val="accent1"/>
+            </a:effectRef>
+            <a:fontRef idx="minor">
+              <a:schemeClr val="lt1"/>
+            </a:fontRef>
+          </p:style>
+          <p:txBody>
+            <a:bodyPr rtlCol="0" anchor="ctr"/>
+            <a:lstStyle/>
+            <a:p>
+              <a:pPr algn="ctr"/>
+            </a:p>
+          </p:txBody>
+        </p:sp>
+        <p:sp>
+          <p:nvSpPr>
+            <p:cNvPr id="40" name="Rectangle 39"/>
+            <p:cNvSpPr/>
+            <p:nvPr/>
+          </p:nvSpPr>
+          <p:spPr>
+            <a:xfrm>
+              <a:off x="5905500" y="9439275"/>
+              <a:ext cx="3429000" cy="28575"/>
+            </a:xfrm>
+            <a:prstGeom prst="rect">
+              <a:avLst/>
+            </a:prstGeom>
+            <a:solidFill>
+              <a:srgbClr val="8C6A4E"/>
+            </a:solidFill>
+            <a:ln>
+              <a:noFill/>
+            </a:ln>
+            <a:effectLst/>
+          </p:spPr>
+          <p:style>
+            <a:lnRef idx="1">
+              <a:schemeClr val="accent1"/>
+            </a:lnRef>
+            <a:fillRef idx="3">
+              <a:schemeClr val="accent1"/>
+            </a:fillRef>
+            <a:effectRef idx="2">
+              <a:schemeClr val="accent1"/>
+            </a:effectRef>
+            <a:fontRef idx="minor">
+              <a:schemeClr val="lt1"/>
+            </a:fontRef>
+          </p:style>
+          <p:txBody>
+            <a:bodyPr rtlCol="0" anchor="ctr"/>
+            <a:lstStyle/>
+            <a:p>
+              <a:pPr algn="ctr"/>
+            </a:p>
+          </p:txBody>
+        </p:sp>
+        <p:sp>
+          <p:nvSpPr>
+            <p:cNvPr id="41" name="Rectangle 40"/>
+            <p:cNvSpPr/>
+            <p:nvPr/>
+          </p:nvSpPr>
+          <p:spPr>
+            <a:xfrm>
+              <a:off x="5905500" y="9584055"/>
+              <a:ext cx="3429000" cy="28575"/>
+            </a:xfrm>
+            <a:prstGeom prst="rect">
+              <a:avLst/>
+            </a:prstGeom>
+            <a:solidFill>
+              <a:srgbClr val="8C6A4E"/>
+            </a:solidFill>
+            <a:ln>
+              <a:noFill/>
+            </a:ln>
+            <a:effectLst/>
+          </p:spPr>
+          <p:style>
+            <a:lnRef idx="1">
+              <a:schemeClr val="accent1"/>
+            </a:lnRef>
+            <a:fillRef idx="3">
+              <a:schemeClr val="accent1"/>
+            </a:fillRef>
+            <a:effectRef idx="2">
+              <a:schemeClr val="accent1"/>
+            </a:effectRef>
+            <a:fontRef idx="minor">
+              <a:schemeClr val="lt1"/>
+            </a:fontRef>
+          </p:style>
+          <p:txBody>
+            <a:bodyPr rtlCol="0" anchor="ctr"/>
+            <a:lstStyle/>
+            <a:p>
+              <a:pPr algn="ctr"/>
+            </a:p>
+          </p:txBody>
+        </p:sp>
+        <p:sp>
+          <p:nvSpPr>
+            <p:cNvPr id="42" name="Rectangle 41"/>
+            <p:cNvSpPr/>
+            <p:nvPr/>
+          </p:nvSpPr>
+          <p:spPr>
+            <a:xfrm>
+              <a:off x="5905500" y="9728835"/>
+              <a:ext cx="3429000" cy="28575"/>
+            </a:xfrm>
+            <a:prstGeom prst="rect">
+              <a:avLst/>
+            </a:prstGeom>
+            <a:solidFill>
+              <a:srgbClr val="8C6A4E"/>
+            </a:solidFill>
+            <a:ln>
+              <a:noFill/>
+            </a:ln>
+            <a:effectLst/>
+          </p:spPr>
+          <p:style>
+            <a:lnRef idx="1">
+              <a:schemeClr val="accent1"/>
+            </a:lnRef>
+            <a:fillRef idx="3">
+              <a:schemeClr val="accent1"/>
+            </a:fillRef>
+            <a:effectRef idx="2">
+              <a:schemeClr val="accent1"/>
+            </a:effectRef>
+            <a:fontRef idx="minor">
+              <a:schemeClr val="lt1"/>
+            </a:fontRef>
+          </p:style>
+          <p:txBody>
+            <a:bodyPr rtlCol="0" anchor="ctr"/>
+            <a:lstStyle/>
+            <a:p>
+              <a:pPr algn="ctr"/>
+            </a:p>
+          </p:txBody>
+        </p:sp>
+      </p:grpSp>
+      <p:sp>
+        <p:nvSpPr>
+          <p:cNvPr id="43" name="Rectangle 42"/>
+          <p:cNvSpPr/>
+          <p:nvPr/>
+        </p:nvSpPr>
+        <p:spPr>
+          <a:xfrm rot="21540000">
+            <a:off x="571500" y="10287000"/>
+            <a:ext cx="9144000" cy="1905000"/>
+          </a:xfrm>
+          <a:prstGeom prst="rect">
+            <a:avLst/>
+          </a:prstGeom>
+          <a:solidFill>
+            <a:srgbClr val="22371F"/>
+          </a:solidFill>
+          <a:ln>
+            <a:noFill/>
+          </a:ln>
+          <a:effectLst>
+            <a:outerShdw blurRad="228600" dist="76200" dir="5400000" algn="t" rotWithShape="0">
+              <a:srgbClr val="000000">
+                <a:alpha val="30000"/>
+              </a:srgbClr>
+            </a:outerShdw>
+          </a:effectLst>
+        </p:spPr>
+        <p:style>
+          <a:lnRef idx="1">
+            <a:schemeClr val="accent1"/>
+          </a:lnRef>
+          <a:fillRef idx="3">
+            <a:schemeClr val="accent1"/>
+          </a:fillRef>
+          <a:effectRef idx="2">
+            <a:schemeClr val="accent1"/>
+          </a:effectRef>
+          <a:fontRef idx="minor">
+            <a:schemeClr val="lt1"/>
+          </a:fontRef>
+        </p:style>
+        <p:txBody>
+          <a:bodyPr rtlCol="0" anchor="ctr"/>
+          <a:lstStyle/>
+          <a:p>
+            <a:pPr algn="ctr"/>
+          </a:p>
+        </p:txBody>
+      </p:sp>
+      <p:sp>
+        <p:nvSpPr>
+          <p:cNvPr id="44" name="Rectangle 43"/>
+          <p:cNvSpPr/>
+          <p:nvPr/>
+        </p:nvSpPr>
+        <p:spPr>
+          <a:xfrm rot="19920000">
+            <a:off x="428625" y="10134600"/>
+            <a:ext cx="1428750" cy="419100"/>
+          </a:xfrm>
+          <a:prstGeom prst="rect">
+            <a:avLst/>
+          </a:prstGeom>
+          <a:solidFill>
+            <a:srgbClr val="DBE6A7">
+              <a:alpha val="70000"/>
+            </a:srgbClr>
+          </a:solidFill>
+          <a:ln>
+            <a:noFill/>
+          </a:ln>
+          <a:effectLst/>
+        </p:spPr>
+        <p:style>
+          <a:lnRef idx="1">
+            <a:schemeClr val="accent1"/>
+          </a:lnRef>
+          <a:fillRef idx="3">
+            <a:schemeClr val="accent1"/>
+          </a:fillRef>
+          <a:effectRef idx="2">
+            <a:schemeClr val="accent1"/>
+          </a:effectRef>
+          <a:fontRef idx="minor">
+            <a:schemeClr val="lt1"/>
+          </a:fontRef>
+        </p:style>
+        <p:txBody>
+          <a:bodyPr rtlCol="0" anchor="ctr"/>
+          <a:lstStyle/>
+          <a:p>
+            <a:pPr algn="ctr"/>
+          </a:p>
+        </p:txBody>
+      </p:sp>
+      <p:sp>
+        <p:nvSpPr>
+          <p:cNvPr id="45" name="Rectangle 44"/>
+          <p:cNvSpPr/>
+          <p:nvPr/>
+        </p:nvSpPr>
+        <p:spPr>
+          <a:xfrm rot="1680000">
+            <a:off x="8429625" y="10134600"/>
+            <a:ext cx="1428750" cy="419100"/>
+          </a:xfrm>
+          <a:prstGeom prst="rect">
+            <a:avLst/>
+          </a:prstGeom>
+          <a:solidFill>
+            <a:srgbClr val="DBE6A7">
+              <a:alpha val="70000"/>
+            </a:srgbClr>
+          </a:solidFill>
+          <a:ln>
+            <a:noFill/>
+          </a:ln>
+          <a:effectLst/>
+        </p:spPr>
+        <p:style>
+          <a:lnRef idx="1">
+            <a:schemeClr val="accent1"/>
+          </a:lnRef>
+          <a:fillRef idx="3">
+            <a:schemeClr val="accent1"/>
+          </a:fillRef>
+          <a:effectRef idx="2">
+            <a:schemeClr val="accent1"/>
+          </a:effectRef>
+          <a:fontRef idx="minor">
+            <a:schemeClr val="lt1"/>
+          </a:fontRef>
+        </p:style>
+        <p:txBody>
+          <a:bodyPr rtlCol="0" anchor="ctr"/>
+          <a:lstStyle/>
+          <a:p>
+            <a:pPr algn="ctr"/>
+          </a:p>
+        </p:txBody>
+      </p:sp>
+      <p:sp>
+        <p:nvSpPr>
+          <p:cNvPr id="46" name="TextBox 45"/>
+          <p:cNvSpPr txBox="1"/>
+          <p:nvPr/>
+        </p:nvSpPr>
+        <p:spPr>
+          <a:xfrm rot="21540000">
+            <a:off x="1047793" y="10768237"/>
+            <a:ext cx="7620000" cy="952500"/>
           </a:xfrm>
           <a:prstGeom prst="rect">
             <a:avLst/>
@@ -3817,22 +5471,46 @@
       </p:sp>
       <p:pic>
         <p:nvPicPr>
-          <p:cNvPr id="9" name="Picture 8" descr="foundation-logo-white.png"/>
+          <p:cNvPr id="47" name="Picture 46" descr="foundation-logo-white.png"/>
           <p:cNvPicPr>
             <a:picLocks noChangeAspect="1"/>
           </p:cNvPicPr>
           <p:nvPr/>
         </p:nvPicPr>
         <p:blipFill>
-          <a:blip r:embed="rId4"/>
+          <a:blip r:embed="rId5"/>
           <a:stretch>
             <a:fillRect/>
           </a:stretch>
         </p:blipFill>
         <p:spPr>
           <a:xfrm>
-            <a:off x="8858250" y="11516532"/>
-            <a:ext cx="857250" cy="770717"/>
+            <a:off x="8572500" y="10953750"/>
+            <a:ext cx="762000" cy="685082"/>
+          </a:xfrm>
+          <a:prstGeom prst="rect">
+            <a:avLst/>
+          </a:prstGeom>
+        </p:spPr>
+      </p:pic>
+      <p:pic>
+        <p:nvPicPr>
+          <p:cNvPr id="48" name="Picture 47" descr="trim-dried-flowers-1-1.png"/>
+          <p:cNvPicPr>
+            <a:picLocks noChangeAspect="1"/>
+          </p:cNvPicPr>
+          <p:nvPr/>
+        </p:nvPicPr>
+        <p:blipFill>
+          <a:blip r:embed="rId6"/>
+          <a:stretch>
+            <a:fillRect/>
+          </a:stretch>
+        </p:blipFill>
+        <p:spPr>
+          <a:xfrm rot="20100000">
+            <a:off x="238125" y="8738972"/>
+            <a:ext cx="1809750" cy="2334054"/>
           </a:xfrm>
           <a:prstGeom prst="rect">
             <a:avLst/>
